--- a/Aethon04_PipelineReview_Mar10_2026.pptx
+++ b/Aethon04_PipelineReview_Mar10_2026.pptx
@@ -5541,7 +5541,7 @@
                 </a:solidFill>
                 <a:latin typeface="Calibri"/>
               </a:rPr>
-              <a:t>February / early March closed $757K across 8 deals — above the $600K monthly target, a strong month.</a:t>
+              <a:t>February / early March closed $757K across 8 deals — above the $600K monthly target.</a:t>
             </a:r>
           </a:p>
           <a:p>
@@ -5569,7 +5569,7 @@
                 </a:solidFill>
                 <a:latin typeface="Calibri"/>
               </a:rPr>
-              <a:t>Revenue mix: new-logo 66% ($499K); expansion / renewal 34% ($258K).</a:t>
+              <a:t>Revenue mix: new-logo 66% ($499K); expansion / renewal 34% ($258K). Greenleaf renewal ($180K) required a 15% discount to counter a Meridian Platform offer.</a:t>
             </a:r>
           </a:p>
           <a:p>
@@ -5597,7 +5597,7 @@
                 </a:solidFill>
                 <a:latin typeface="Calibri"/>
               </a:rPr>
-              <a:t>Key wins: Greenleaf renewal $180K, BrightPath Workforce Analytics $142K, Nexus Financial Enterprise $118K.</a:t>
+              <a:t>Key wins: BrightPath Workforce Analytics $142K (webinar-sourced), Nexus Financial Enterprise $118K, Meridian Corp Insights $85K.</a:t>
             </a:r>
           </a:p>
           <a:p>
@@ -6258,7 +6258,7 @@
                 </a:solidFill>
                 <a:latin typeface="Calibri"/>
               </a:rPr>
-              <a:t>Late-stage pipeline strong: $472K in Contract Sent, $655K in Decision Maker Bought-In.</a:t>
+              <a:t>Late-stage pipeline strong: $472K Contract Sent (DataVault $420K), $655K Decision Maker (Pinnacle $340K, Cascade $185K).</a:t>
             </a:r>
           </a:p>
           <a:p>
@@ -6286,7 +6286,7 @@
                 </a:solidFill>
                 <a:latin typeface="Calibri"/>
               </a:rPr>
-              <a:t>Outbound-generated enterprise deals dominate: DataVault $420K, Pinnacle $340K, Summit $285K.</a:t>
+              <a:t>Territory split: East pipeline $1.84M (55% marketing-sourced); West pipeline $1.10M (28% marketing-sourced).</a:t>
             </a:r>
           </a:p>
         </p:txBody>
@@ -6947,7 +6947,7 @@
                 </a:solidFill>
                 <a:latin typeface="Calibri"/>
               </a:rPr>
-              <a:t>DataVault Corp ($420K) is the largest commit deal — contract sent, expected close mid-April. Pinnacle Industries ($340K) has decision-maker buy-in, targeting end of April.</a:t>
+              <a:t>DataVault ($420K): 18% discount under review (3-yr commit, fintech vertical); needs CFO sign-off. Pinnacle ($340K): decision-maker bought in, targeting end of April.</a:t>
             </a:r>
           </a:p>
         </p:txBody>
@@ -7556,7 +7556,7 @@
                 </a:solidFill>
                 <a:latin typeface="Calibri"/>
               </a:rPr>
-              <a:t>Three losses to Meridian Platform (Apex Dynamics $95K, Crestview Group $72K, HarborTech $58K) — now a clear competitive pattern requiring response.</a:t>
+              <a:t>Three losses to Meridian Platform ($225K total: Apex Dynamics $95K, Crestview $72K, HarborTech $58K). Meridian is pricing ~25% below list — also used to threaten the Greenleaf renewal.</a:t>
             </a:r>
           </a:p>
         </p:txBody>
@@ -7874,7 +7874,7 @@
                 </a:solidFill>
                 <a:latin typeface="Calibri"/>
               </a:rPr>
-              <a:t>30%</a:t>
+              <a:t>45%</a:t>
             </a:r>
           </a:p>
         </p:txBody>
@@ -8137,7 +8137,7 @@
                 </a:solidFill>
                 <a:latin typeface="Calibri"/>
               </a:rPr>
-              <a:t>Marketing-sourced closed revenue was 30% in the period (BrightPath $142K, Meridian Corp $85K); open pipeline contribution lower at ~11%.</a:t>
+              <a:t>Marketing-sourced pipeline is 45% of open deals ($1.32M of $2.94M). Territory gap: East 55% vs West 28% — extending top campaigns to West is the top lever.</a:t>
             </a:r>
           </a:p>
           <a:p>
@@ -8165,7 +8165,7 @@
                 </a:solidFill>
                 <a:latin typeface="Calibri"/>
               </a:rPr>
-              <a:t>Insights Launch and Newsletter Promo campaigns generating pipeline ($371K open); Workforce Analytics Webinar delivered the BrightPath win.</a:t>
+              <a:t>Q1 Workforce Analytics Webinar is the top campaign: 8 SQLs, $840K attributed pipeline (East only). Paid media budget increased to $275K (+$35K) after LinkedIn CPCs rose 22%.</a:t>
             </a:r>
           </a:p>
         </p:txBody>
@@ -8746,7 +8746,7 @@
                 </a:solidFill>
                 <a:latin typeface="Calibri"/>
               </a:rPr>
-              <a:t>Pipeline coverage still below 3× — need continued LinkedIn spend increase and additional outbound campaigns for Q2 pipeline.</a:t>
+              <a:t>DataVault $420K pricing exception (18% discount) awaiting CFO approval — deal contingent on sign-off.</a:t>
             </a:r>
           </a:p>
           <a:p>
@@ -8774,7 +8774,7 @@
                 </a:solidFill>
                 <a:latin typeface="Calibri"/>
               </a:rPr>
-              <a:t>Meridian Platform competitive response: 3 losses in February totaling $225K — requesting competitive battle card and pricing review.</a:t>
+              <a:t>Extend Workforce Analytics Webinar to West territory — East delivers 55% marketing-sourced pipeline vs West 28%; this is the fastest path to close the gap.</a:t>
             </a:r>
           </a:p>
           <a:p>
@@ -8802,7 +8802,7 @@
                 </a:solidFill>
                 <a:latin typeface="Calibri"/>
               </a:rPr>
-              <a:t>Sales-tool evaluation: decision was due mid-February — need status update and timeline to close.</a:t>
+              <a:t>Meridian Corp ($85K) rollout paused for legal DPA review — expected 2–3 weeks; no product concerns.</a:t>
             </a:r>
           </a:p>
         </p:txBody>
@@ -9383,7 +9383,7 @@
                 </a:solidFill>
                 <a:latin typeface="Calibri"/>
               </a:rPr>
-              <a:t>Meridian Platform is now a confirmed competitive threat — 3 losses in February ($225K). Without a response plan, expect continued losses in Q2.</a:t>
+              <a:t>Meridian Platform: 3 losses ($225K) plus aggressive pricing on renewals (~25% below list). Greenleaf saved with 15% discount; expect more pricing pressure in Q2.</a:t>
             </a:r>
           </a:p>
           <a:p>
@@ -9411,7 +9411,7 @@
                 </a:solidFill>
                 <a:latin typeface="Calibri"/>
               </a:rPr>
-              <a:t>Pipeline coverage at 2.19× (improved from 1.75×) but still short of 3× target. Q2 quota attainment depends on sustained pipeline creation.</a:t>
+              <a:t>Pipeline coverage at 2.19× (up from 1.75×) but still short of 3×. West territory marketing-sourced pipeline is only 28% — over-reliance on outbound is a concentration risk.</a:t>
             </a:r>
           </a:p>
           <a:p>
@@ -9439,7 +9439,7 @@
                 </a:solidFill>
                 <a:latin typeface="Calibri"/>
               </a:rPr>
-              <a:t>Marketing-sourced pipeline share declining (30% closed, ~11% open). Over-reliance on outbound for Q2 is a concentration risk.</a:t>
+              <a:t>Veldra Insights launch rescheduled to March 22 — press-kit timeline at risk from rebrand budget reallocation. Could affect Q2 pipeline generation if delayed further.</a:t>
             </a:r>
           </a:p>
         </p:txBody>
